--- a/project-documentation/slides/week-02-deck.pptx
+++ b/project-documentation/slides/week-02-deck.pptx
@@ -18,6 +18,8 @@
     <p:sldId id="266" r:id="rId18"/>
     <p:sldId id="267" r:id="rId19"/>
     <p:sldId id="268" r:id="rId20"/>
+    <p:sldId id="269" r:id="rId21"/>
+    <p:sldId id="270" r:id="rId22"/>
   </p:sldIdLst>
   <p:sldSz cx="12191695" cy="6858000" type="screen4x3"/>
   <p:notesSz cx="6858000" cy="9144000"/>
@@ -596,25 +598,13 @@
           <a:lstStyle/>
           <a:p>
             <a:r>
-              <a:t>AI gives you what you ask for, not what is true. Ask for the US case and you get a convincing US case; the same for China, the same for Europe.</a:t>
+              <a:t>Two assignments this week, and they are one lesson in two halves. Assignment 1 makes bias appear on purpose; assignment 2 makes the antidote — criteria and strategy — explicit.</a:t>
             </a:r>
           </a:p>
           <a:p/>
           <a:p>
             <a:r>
-              <a:t>Source diversity is the fix, and it is what actually teaches you who leads. A cleverer prompt does not.</a:t>
-            </a:r>
-          </a:p>
-          <a:p/>
-          <a:p>
-            <a:r>
-              <a:t>It matters twice: for business judgement, informed and unbiased; and personally, knowing your own starting position.</a:t>
-            </a:r>
-          </a:p>
-          <a:p/>
-          <a:p>
-            <a:r>
-              <a:t>Bridge to dependency, from the plan for this week: who builds these systems, who funds them, who could buy them? Open weights, closed weights, hosted API, on-premise — what does each mean for a forty-person firm with no IT department? What would your target SME lose if its tool changed price, terms or European availability?</a:t>
+              <a:t>Walk both briefly here; the next slides carry each in turn.</a:t>
             </a:r>
           </a:p>
         </p:txBody>
@@ -684,19 +674,19 @@
           <a:lstStyle/>
           <a:p>
             <a:r>
-              <a:t>The question: good-quality reports on the geopolitics of the AI race — US, China, Europe.</a:t>
+              <a:t>Three prompts, three separate conversations. Ask AI to argue that the US dominates AI. In a new conversation, that China does. Then Europe.</a:t>
             </a:r>
           </a:p>
           <a:p/>
           <a:p>
             <a:r>
-              <a:t>Two things made explicit and written down: what makes a source good quality here, and how you searched and why.</a:t>
+              <a:t>No cross-referencing: each article is written as if it were the only one being produced.</a:t>
             </a:r>
           </a:p>
           <a:p/>
           <a:p>
             <a:r>
-              <a:t>Then AI, carefully: a first analysis of your sources with AI, with your strategy made explicit too. The order matters — sources and criteria first, the model second.</a:t>
+              <a:t>Then read the three back to back. Stop here and ask what they notice before showing the next slide; the takeaway lands harder if the room says it first.</a:t>
             </a:r>
           </a:p>
         </p:txBody>
@@ -766,31 +756,25 @@
           <a:lstStyle/>
           <a:p>
             <a:r>
-              <a:t>Partner teams. Pair by wall position: 1 with 2, 3 with 4, 5 with 6. An odd count makes a ring of three. Say once: this pairing holds for the rest of the run. They read everything you publish; you read theirs.</a:t>
+              <a:t>AI gives you what you ask for, not what is true. Ask for the US case and you get a convincing US case; the same for China, the same for Europe.</a:t>
             </a:r>
           </a:p>
           <a:p/>
           <a:p>
             <a:r>
-              <a:t>The Socratic agent: an AI tutor, run by us, questions every team's thinking. It reads the page you publish and the document you post; questions come back in your Teams channel. Informational, not scored, and it never will be.</a:t>
+              <a:t>Source diversity is the fix, and it is what actually teaches you who leads. A cleverer prompt does not.</a:t>
             </a:r>
           </a:p>
           <a:p/>
           <a:p>
             <a:r>
-              <a:t>Where things go: the document in your team's Teams channel; the page handed in by being published.</a:t>
+              <a:t>It matters twice: for business judgement, informed and unbiased; and personally, knowing your own starting position.</a:t>
             </a:r>
           </a:p>
           <a:p/>
           <a:p>
             <a:r>
-              <a:t>Portfolio: the second entry is the first with the four standard questions, because there is now a page and both gates have run.</a:t>
-            </a:r>
-          </a:p>
-          <a:p/>
-          <a:p>
-            <a:r>
-              <a:t>Field research opens. Nobody approaches a company before the consent text is signed off, and interview material never goes through a free tier or the tutor.</a:t>
+              <a:t>Bridge to dependency, from the plan for this week: who builds these systems, who funds them, who could buy them? Open weights, closed weights, hosted API, on-premise — what does each mean for a forty-person firm with no IT department? What would your target SME lose if its tool changed price, terms or European availability?</a:t>
             </a:r>
           </a:p>
         </p:txBody>
@@ -860,6 +844,182 @@
           <a:lstStyle/>
           <a:p>
             <a:r>
+              <a:t>The question: good-quality reports on the geopolitics of the AI race — US, China, Europe.</a:t>
+            </a:r>
+          </a:p>
+          <a:p/>
+          <a:p>
+            <a:r>
+              <a:t>Two things made explicit and written down: what makes a source good quality here, and how you searched and why.</a:t>
+            </a:r>
+          </a:p>
+          <a:p/>
+          <a:p>
+            <a:r>
+              <a:t>Then AI, carefully: a first analysis of your sources with AI, with your strategy made explicit too. The order matters — sources and criteria first, the model second.</a:t>
+            </a:r>
+          </a:p>
+        </p:txBody>
+      </p:sp>
+      <p:sp>
+        <p:nvSpPr>
+          <p:cNvPr id="4" name="Slide Number Placeholder 3"/>
+          <p:cNvSpPr>
+            <a:spLocks noGrp="1"/>
+          </p:cNvSpPr>
+          <p:nvPr>
+            <p:ph type="sldNum" idx="5" sz="quarter"/>
+          </p:nvPr>
+        </p:nvSpPr>
+        <p:spPr/>
+      </p:sp>
+    </p:spTree>
+  </p:cSld>
+  <p:clrMapOvr>
+    <a:masterClrMapping/>
+  </p:clrMapOvr>
+</p:notes>
+</file>
+
+<file path=ppt/notesSlides/notesSlide14.xml><?xml version="1.0" encoding="utf-8"?>
+<p:notes xmlns:a="http://schemas.openxmlformats.org/drawingml/2006/main" xmlns:p="http://schemas.openxmlformats.org/presentationml/2006/main" xmlns:r="http://schemas.openxmlformats.org/officeDocument/2006/relationships">
+  <p:cSld>
+    <p:spTree>
+      <p:nvGrpSpPr>
+        <p:cNvPr id="1" name=""/>
+        <p:cNvGrpSpPr/>
+        <p:nvPr/>
+      </p:nvGrpSpPr>
+      <p:grpSpPr>
+        <a:xfrm>
+          <a:off x="0" y="0"/>
+          <a:ext cx="0" cy="0"/>
+          <a:chOff x="0" y="0"/>
+          <a:chExt cx="0" cy="0"/>
+        </a:xfrm>
+      </p:grpSpPr>
+      <p:sp>
+        <p:nvSpPr>
+          <p:cNvPr id="2" name="Slide Image Placeholder 1"/>
+          <p:cNvSpPr>
+            <a:spLocks noGrp="1"/>
+          </p:cNvSpPr>
+          <p:nvPr>
+            <p:ph type="sldImg" idx="2"/>
+          </p:nvPr>
+        </p:nvSpPr>
+        <p:spPr/>
+      </p:sp>
+      <p:sp>
+        <p:nvSpPr>
+          <p:cNvPr id="3" name="Notes Placeholder 2"/>
+          <p:cNvSpPr>
+            <a:spLocks noGrp="1"/>
+          </p:cNvSpPr>
+          <p:nvPr>
+            <p:ph type="body" idx="3" sz="quarter"/>
+          </p:nvPr>
+        </p:nvSpPr>
+        <p:spPr/>
+        <p:txBody>
+          <a:bodyPr/>
+          <a:lstStyle/>
+          <a:p>
+            <a:r>
+              <a:t>Partner teams. Pair by wall position: 1 with 2, 3 with 4, 5 with 6. An odd count makes a ring of three. Say once: this pairing holds for the rest of the run. They read everything you publish; you read theirs.</a:t>
+            </a:r>
+          </a:p>
+          <a:p/>
+          <a:p>
+            <a:r>
+              <a:t>The Socratic agent: an AI tutor, run by us, questions every team's thinking. It reads the page you publish and the document you post; questions come back in your Teams channel. Informational, not scored, and it never will be.</a:t>
+            </a:r>
+          </a:p>
+          <a:p/>
+          <a:p>
+            <a:r>
+              <a:t>Where things go: the document in your team's Teams channel; the page handed in by being published.</a:t>
+            </a:r>
+          </a:p>
+          <a:p/>
+          <a:p>
+            <a:r>
+              <a:t>Portfolio: the second entry is the first with the four standard questions, because there is now a page and both gates have run.</a:t>
+            </a:r>
+          </a:p>
+          <a:p/>
+          <a:p>
+            <a:r>
+              <a:t>Field research opens. Nobody approaches a company before the consent text is signed off, and interview material never goes through a free tier or the tutor.</a:t>
+            </a:r>
+          </a:p>
+        </p:txBody>
+      </p:sp>
+      <p:sp>
+        <p:nvSpPr>
+          <p:cNvPr id="4" name="Slide Number Placeholder 3"/>
+          <p:cNvSpPr>
+            <a:spLocks noGrp="1"/>
+          </p:cNvSpPr>
+          <p:nvPr>
+            <p:ph type="sldNum" idx="5" sz="quarter"/>
+          </p:nvPr>
+        </p:nvSpPr>
+        <p:spPr/>
+      </p:sp>
+    </p:spTree>
+  </p:cSld>
+  <p:clrMapOvr>
+    <a:masterClrMapping/>
+  </p:clrMapOvr>
+</p:notes>
+</file>
+
+<file path=ppt/notesSlides/notesSlide15.xml><?xml version="1.0" encoding="utf-8"?>
+<p:notes xmlns:a="http://schemas.openxmlformats.org/drawingml/2006/main" xmlns:p="http://schemas.openxmlformats.org/presentationml/2006/main" xmlns:r="http://schemas.openxmlformats.org/officeDocument/2006/relationships">
+  <p:cSld>
+    <p:spTree>
+      <p:nvGrpSpPr>
+        <p:cNvPr id="1" name=""/>
+        <p:cNvGrpSpPr/>
+        <p:nvPr/>
+      </p:nvGrpSpPr>
+      <p:grpSpPr>
+        <a:xfrm>
+          <a:off x="0" y="0"/>
+          <a:ext cx="0" cy="0"/>
+          <a:chOff x="0" y="0"/>
+          <a:chExt cx="0" cy="0"/>
+        </a:xfrm>
+      </p:grpSpPr>
+      <p:sp>
+        <p:nvSpPr>
+          <p:cNvPr id="2" name="Slide Image Placeholder 1"/>
+          <p:cNvSpPr>
+            <a:spLocks noGrp="1"/>
+          </p:cNvSpPr>
+          <p:nvPr>
+            <p:ph type="sldImg" idx="2"/>
+          </p:nvPr>
+        </p:nvSpPr>
+        <p:spPr/>
+      </p:sp>
+      <p:sp>
+        <p:nvSpPr>
+          <p:cNvPr id="3" name="Notes Placeholder 2"/>
+          <p:cNvSpPr>
+            <a:spLocks noGrp="1"/>
+          </p:cNvSpPr>
+          <p:nvPr>
+            <p:ph type="body" idx="3" sz="quarter"/>
+          </p:nvPr>
+        </p:nvSpPr>
+        <p:spPr/>
+        <p:txBody>
+          <a:bodyPr/>
+          <a:lstStyle/>
+          <a:p>
+            <a:r>
               <a:t>Every time we spot a habit worth keeping, we turn it into a rule. Rule 1: before taking a break, always set AI to work.</a:t>
             </a:r>
           </a:p>
@@ -1222,51 +1382,97 @@
           <a:lstStyle/>
           <a:p>
             <a:r>
-              <a:t>Eight drafts, read against the twenty published criteria. The user journey, the users and the functional requirements were solid nearly everywhere. Three things were missing nearly everywhere too. The three quotes on the slide are from three different drafts, shortened, with nothing that names a team or a firm; each shows what the draft wrote where the criterion asks for something else.</a:t>
+              <a:t>Eight drafts, read against the twenty published criteria. The user journey, the users and the functional requirements were solid nearly everywhere. What was missing is one thing, seen at three points of the same argument: nothing in the draft could be proven wrong.</a:t>
             </a:r>
           </a:p>
           <a:p/>
           <a:p>
             <a:r>
-              <a:t>• How you will know it works. The quote is a quality, and a fair one, but nothing says how you would measure it or when. No draft says what it will measure, or when. Criterion C3: one measure that matters most, one about the product, one about the AI, one guardrail — each with a cadence.</a:t>
-            </a:r>
-          </a:p>
-          <a:p>
-            <a:r>
-              <a:t>• A hypothesis you could be wrong about. The quote is a goal; nothing in it could be proved wrong by a week of use. Goals, yes; a falsifiable claim, no. The template: by bringing X to life, Y becomes easier, faster or more reliable for us, and we will see it in Z.</a:t>
-            </a:r>
-          </a:p>
-          <a:p>
-            <a:r>
-              <a:t>• Pain points carried by evidence. The quote asserts the problem; nothing shows it. The problem is asserted in every draft. The week-1 spike's failure log and the AIBS problem analysis are the evidence; point at them.</a:t>
+              <a:t>The three points are the criteria page's own order, and they are a chain:</a:t>
             </a:r>
           </a:p>
           <a:p/>
           <a:p>
             <a:r>
+              <a:t>• Before is the evidence for the pain point (A3): something observed, in the failure log or the problem analysis, that costs the team time or quality today.</a:t>
+            </a:r>
+          </a:p>
+          <a:p>
+            <a:r>
+              <a:t>• Claim is the hypothesis (A5): this feature will change that observed thing, by roughly this much, by this week.</a:t>
+            </a:r>
+          </a:p>
+          <a:p>
+            <a:r>
+              <a:t>• After is how you will know it works (C3): the measures, and the cadence, that would show the claim held or failed.</a:t>
+            </a:r>
+          </a:p>
+          <a:p/>
+          <a:p>
+            <a:r>
+              <a:t>Take one away and the other two stop working. A hypothesis without a measured pain has nothing to improve on. A measure without a hypothesis is a number nobody acts on. Evidence without a claim is a complaint. The one team that came closest on all three is the same team each time, which is the point: it is one thread, not three items.</a:t>
+            </a:r>
+          </a:p>
+          <a:p/>
+          <a:p>
+            <a:r>
+              <a:t>The three quotes are from one draft, shortened, with nothing that names the team or its firm. It is the draft that shows the chain best, because it has all three links on one theme, time, and still cannot be proven wrong:</a:t>
+            </a:r>
+          </a:p>
+          <a:p/>
+          <a:p>
+            <a:r>
+              <a:t>• Before: the pain is named, and it is time. But it is asserted; nothing shows it. No failure-log entry, no finding from the problem analysis, no number for how long the manual route took last week.</a:t>
+            </a:r>
+          </a:p>
+          <a:p>
+            <a:r>
+              <a:t>• Claim: the goal says faster. A goal, with no size and no date; nothing in it could be proved wrong by a week of use. The template: by bringing X to life, Y becomes easier, faster or more reliable for us, and we will see it in Z.</a:t>
+            </a:r>
+          </a:p>
+          <a:p>
+            <a:r>
+              <a:t>• After: success is one reliable, reviewed page a week. That counts pages, and never time — so the one thing the claim promised is the one thing the measure cannot see. Nor does it say what reliable means, or who checks. Criterion C3: one measure that matters most, one about the product, one about the AI, one guardrail — each with a cadence.</a:t>
+            </a:r>
+          </a:p>
+          <a:p/>
+          <a:p>
+            <a:r>
+              <a:t>Ask the room: if this team ships and produces one page a week, do we know the research got faster? No. That is the gap.</a:t>
+            </a:r>
+          </a:p>
+          <a:p/>
+          <a:p>
+            <a:r>
+              <a:t>What the thread looks like when it holds, invented for the course's own platform, not taken from a draft. Say it aloud as one story, or write it on the board:</a:t>
+            </a:r>
+          </a:p>
+          <a:p/>
+          <a:p>
+            <a:r>
+              <a:t>• Before. "In the week-1 spike the agent drafted a page with six sources; two links did not resolve and one quoted a figure the source does not contain (failure log, entries 3–5). The problem analysis found that three of the four of us cannot read the CBS and KvK material in Dutch, so one person did all the source work last week."</a:t>
+            </a:r>
+          </a:p>
+          <a:p>
+            <a:r>
+              <a:t>• Claim. "By giving the platform a source-appraisal step that scores publisher, date and relevance, checking a page's sources takes a researcher under an hour instead of an afternoon. We will see it in the logged review time by week 3."</a:t>
+            </a:r>
+          </a:p>
+          <a:p>
+            <a:r>
+              <a:t>• After. "North star: one published page a week that passes the peer gate without a factual correction. Product measure: hours from first source to published page, logged every week. AI measure: unconfirmable citations per page, counted at every review. Guardrail: pages published that nobody on the team read in full — zero, checked at every hand-in."</a:t>
+            </a:r>
+          </a:p>
+          <a:p/>
+          <a:p>
+            <a:r>
+              <a:t>The same failure appears in the before, is named in the claim, and is counted in the after. That is what "could be proven wrong" means: by week 3 the review time either fell or it did not.</a:t>
+            </a:r>
+          </a:p>
+          <a:p/>
+          <a:p>
+            <a:r>
               <a:t>And the small one: a header. Name, version, date, who wrote it, where the related documents are. Three drafts also ran past three pages; a PRD that has not chosen what matters has not finished choosing.</a:t>
-            </a:r>
-          </a:p>
-          <a:p/>
-          <a:p>
-            <a:r>
-              <a:t>What a good one looks like, one per issue. Say these aloud after the quotes, or write one on the board; they are invented for the course's own platform, not taken from a draft.</a:t>
-            </a:r>
-          </a:p>
-          <a:p/>
-          <a:p>
-            <a:r>
-              <a:t>• How you will know it works. "North star: one published page a week that passes the peer gate without a factual correction. Product measure: hours from first source to published page, logged every week. AI measure: unconfirmable citations per page, counted at every review. Guardrail: pages published that nobody on the team read in full — zero, checked at every hand-in." Four measures, each with a cadence.</a:t>
-            </a:r>
-          </a:p>
-          <a:p>
-            <a:r>
-              <a:t>• A hypothesis you could be wrong about. "By giving the platform a source-appraisal step that scores publisher, date and relevance, checking a page's sources takes a researcher under an hour instead of an afternoon. We will see it in the logged review time by week 3." If review time does not fall, the hypothesis is wrong, and the team knows by when.</a:t>
-            </a:r>
-          </a:p>
-          <a:p>
-            <a:r>
-              <a:t>• Pain points carried by evidence. "In the week-1 spike the agent drafted a page with six sources; two links did not resolve and one quoted a figure the source does not contain (failure log, entries 3–5). The problem analysis found that three of the four of us cannot read the CBS and KvK material in Dutch, so one person did all the source work last week." A failure log entry and a problem-analysis finding, pointed at, not asserted.</a:t>
             </a:r>
           </a:p>
           <a:p/>
@@ -1430,13 +1636,19 @@
           <a:lstStyle/>
           <a:p>
             <a:r>
-              <a:t>We look at every assignment this way, and so should you. Make the split visible in your own work: what did you write, what did AI draft, and what did you check?</a:t>
+              <a:t>What a part is, for a research platform: a step on the path from a source to a published page — add material, appraise it, translate it, draft, check, publish. Each step is a box; the blueprint names the boxes and what each one does. No code in this document. The developer holds the pen because they will build it, and the whole team reads it because the PRD's promises are theirs.</a:t>
             </a:r>
           </a:p>
           <a:p/>
           <a:p>
             <a:r>
-              <a:t>The rule underneath it, for the handbook pages: every claim needs an appraised source, and "the model said so" is not one.</a:t>
+              <a:t>The architecture-styles wheel exists — microservices, event-driven, layered, CQRS and thirty more. Say plainly that almost all of it is for systems at scale. Their platform is a pipeline, and naming that is the whole style choice. The same for the "system design blueprint" ingredients lists on the web: seven ingredients, of which two apply here — the high-level architecture and the data flow. Scaling, load balancing, replication, dashboards: not this document.</a:t>
+            </a:r>
+          </a:p>
+          <a:p/>
+          <a:p>
+            <a:r>
+              <a:t>The first part most teams will draw is the context file the platform always reads: target SME, quality criteria, out of scope. That is this week's context-layer block seen from the blueprint's side. One to three pages; a one-page blueprint that clears the bar beats three that do not.</a:t>
             </a:r>
           </a:p>
         </p:txBody>
@@ -1506,13 +1718,25 @@
           <a:lstStyle/>
           <a:p>
             <a:r>
-              <a:t>Two assignments this week, and they are one lesson in two halves. Assignment 1 makes bias appear on purpose; assignment 2 makes the antidote — criteria and strategy — explicit.</a:t>
+              <a:t>What "passes between parts" means: a file with a fixed shape. That file is the contract, and it is what lets two people build two parts at once without talking every hour. Ask them to name the file and its shape for at least one seam.</a:t>
             </a:r>
           </a:p>
           <a:p/>
           <a:p>
             <a:r>
-              <a:t>Walk both briefly here; the next slides carry each in turn.</a:t>
+              <a:t>The line nothing may cross, with our own example: interview material never reaches a model service. Their platform has an equivalent, and the blueprint says in one sentence where it runs and what keeps it there.</a:t>
+            </a:r>
+          </a:p>
+          <a:p/>
+          <a:p>
+            <a:r>
+              <a:t>From this week the tutor reads the blueprint beside the PRD and looks for three things: a promise in the PRD that no part carries, a part that no promise asked for, and a departure — which is allowed, if the blueprint says so and the PRD is revised with a version, a date and one line of reason. A blueprint that quietly drops a promise is exactly what it finds.</a:t>
+            </a:r>
+          </a:p>
+          <a:p/>
+          <a:p>
+            <a:r>
+              <a:t>Dates, for those who need them first: due before the week-3 session, posted in the team's Teams channel. Three to five questions come back. No mark.</a:t>
             </a:r>
           </a:p>
         </p:txBody>
@@ -1582,19 +1806,13 @@
           <a:lstStyle/>
           <a:p>
             <a:r>
-              <a:t>Three prompts, three separate conversations. Ask AI to argue that the US dominates AI. In a new conversation, that China does. Then Europe.</a:t>
+              <a:t>We look at every assignment this way, and so should you. Make the split visible in your own work: what did you write, what did AI draft, and what did you check?</a:t>
             </a:r>
           </a:p>
           <a:p/>
           <a:p>
             <a:r>
-              <a:t>No cross-referencing: each article is written as if it were the only one being produced.</a:t>
-            </a:r>
-          </a:p>
-          <a:p/>
-          <a:p>
-            <a:r>
-              <a:t>Then read the three back to back. Stop here and ask what they notice before showing the next slide; the takeaway lands harder if the room says it first.</a:t>
+              <a:t>The rule underneath it, for the handbook pages: every claim needs an appraised source, and "the model said so" is not one.</a:t>
             </a:r>
           </a:p>
         </p:txBody>
@@ -4713,7 +4931,7 @@
                   <a:srgbClr val="6B7280"/>
                 </a:solidFill>
               </a:rPr>
-              <a:t>1 / 13</a:t>
+              <a:t>1 / 15</a:t>
             </a:r>
           </a:p>
         </p:txBody>
@@ -4911,7 +5129,7 @@
                   <a:srgbClr val="1A1A1A"/>
                 </a:solidFill>
               </a:rPr>
-              <a:t>TAKEAWAY</a:t>
+              <a:t>ASSIGNMENTS</a:t>
             </a:r>
           </a:p>
         </p:txBody>
@@ -4945,7 +5163,7 @@
                   <a:srgbClr val="6B7280"/>
                 </a:solidFill>
               </a:rPr>
-              <a:t>10 / 13</a:t>
+              <a:t>10 / 15</a:t>
             </a:r>
           </a:p>
         </p:txBody>
@@ -4978,7 +5196,7 @@
                   <a:srgbClr val="111827"/>
                 </a:solidFill>
               </a:rPr>
-              <a:t>AI gives you what you ask for</a:t>
+              <a:t>Two assignments this week</a:t>
             </a:r>
           </a:p>
         </p:txBody>
@@ -4992,7 +5210,7 @@
         <p:spPr>
           <a:xfrm>
             <a:off x="731520" y="2103120"/>
-            <a:ext cx="10698480" cy="3931920"/>
+            <a:ext cx="5120640" cy="3931920"/>
           </a:xfrm>
           <a:prstGeom prst="rect">
             <a:avLst/>
@@ -5011,28 +5229,12 @@
               </a:spcAft>
             </a:pPr>
             <a:r>
-              <a:rPr sz="1800">
-                <a:solidFill>
-                  <a:srgbClr val="111827"/>
-                </a:solidFill>
-              </a:rPr>
-              <a:t>•  </a:t>
-            </a:r>
-            <a:r>
-              <a:rPr sz="1800" b="1">
-                <a:solidFill>
-                  <a:srgbClr val="111827"/>
-                </a:solidFill>
-              </a:rPr>
-              <a:t>Not what's true.</a:t>
-            </a:r>
-            <a:r>
-              <a:rPr sz="1800">
-                <a:solidFill>
-                  <a:srgbClr val="111827"/>
-                </a:solidFill>
-              </a:rPr>
-              <a:t> Ask for the US case and you get a convincing US case — same for China, same for Europe.</a:t>
+              <a:rPr sz="1100" b="1">
+                <a:solidFill>
+                  <a:srgbClr val="4B5563"/>
+                </a:solidFill>
+              </a:rPr>
+              <a:t>ASSIGNMENT 1</a:t>
             </a:r>
           </a:p>
           <a:p>
@@ -5050,20 +5252,12 @@
               <a:t>•  </a:t>
             </a:r>
             <a:r>
-              <a:rPr sz="1800" b="1">
-                <a:solidFill>
-                  <a:srgbClr val="111827"/>
-                </a:solidFill>
-              </a:rPr>
-              <a:t>Source diversity is the fix.</a:t>
-            </a:r>
-            <a:r>
               <a:rPr sz="1800">
                 <a:solidFill>
                   <a:srgbClr val="111827"/>
                 </a:solidFill>
               </a:rPr>
-              <a:t> That's what actually teaches you who leads — not a cleverer prompt.</a:t>
+              <a:t>Report writing with AI — three articles, three “winners”</a:t>
             </a:r>
           </a:p>
           <a:p>
@@ -5081,20 +5275,12 @@
               <a:t>•  </a:t>
             </a:r>
             <a:r>
-              <a:rPr sz="1800" b="1">
-                <a:solidFill>
-                  <a:srgbClr val="111827"/>
-                </a:solidFill>
-              </a:rPr>
-              <a:t>This matters twice.</a:t>
-            </a:r>
-            <a:r>
               <a:rPr sz="1800">
                 <a:solidFill>
                   <a:srgbClr val="111827"/>
                 </a:solidFill>
               </a:rPr>
-              <a:t> For your business judgement (informed, unbiased) and for you personally (know your own starting position).</a:t>
+              <a:t>Goal: see bias appear on purpose</a:t>
             </a:r>
           </a:p>
         </p:txBody>
@@ -5102,6 +5288,90 @@
       <p:sp>
         <p:nvSpPr>
           <p:cNvPr id="7" name="TextBox 6"/>
+          <p:cNvSpPr txBox="1"/>
+          <p:nvPr/>
+        </p:nvSpPr>
+        <p:spPr>
+          <a:xfrm>
+            <a:off x="6309360" y="2103120"/>
+            <a:ext cx="5120640" cy="3931920"/>
+          </a:xfrm>
+          <a:prstGeom prst="rect">
+            <a:avLst/>
+          </a:prstGeom>
+          <a:noFill/>
+        </p:spPr>
+        <p:txBody>
+          <a:bodyPr wrap="square">
+            <a:spAutoFit/>
+          </a:bodyPr>
+          <a:lstStyle/>
+          <a:p>
+            <a:pPr>
+              <a:spcAft>
+                <a:spcPts val="800"/>
+              </a:spcAft>
+            </a:pPr>
+            <a:r>
+              <a:rPr sz="1100" b="1">
+                <a:solidFill>
+                  <a:srgbClr val="4B5563"/>
+                </a:solidFill>
+              </a:rPr>
+              <a:t>ASSIGNMENT 2</a:t>
+            </a:r>
+          </a:p>
+          <a:p>
+            <a:pPr>
+              <a:spcAft>
+                <a:spcPts val="800"/>
+              </a:spcAft>
+            </a:pPr>
+            <a:r>
+              <a:rPr sz="1800">
+                <a:solidFill>
+                  <a:srgbClr val="111827"/>
+                </a:solidFill>
+              </a:rPr>
+              <a:t>•  </a:t>
+            </a:r>
+            <a:r>
+              <a:rPr sz="1800">
+                <a:solidFill>
+                  <a:srgbClr val="111827"/>
+                </a:solidFill>
+              </a:rPr>
+              <a:t>Search strategies and quality criteria — US, China, Europe</a:t>
+            </a:r>
+          </a:p>
+          <a:p>
+            <a:pPr>
+              <a:spcAft>
+                <a:spcPts val="800"/>
+              </a:spcAft>
+            </a:pPr>
+            <a:r>
+              <a:rPr sz="1800">
+                <a:solidFill>
+                  <a:srgbClr val="111827"/>
+                </a:solidFill>
+              </a:rPr>
+              <a:t>•  </a:t>
+            </a:r>
+            <a:r>
+              <a:rPr sz="1800">
+                <a:solidFill>
+                  <a:srgbClr val="111827"/>
+                </a:solidFill>
+              </a:rPr>
+              <a:t>Goal: make your criteria and strategy explicit</a:t>
+            </a:r>
+          </a:p>
+        </p:txBody>
+      </p:sp>
+      <p:sp>
+        <p:nvSpPr>
+          <p:cNvPr id="8" name="TextBox 7"/>
           <p:cNvSpPr txBox="1"/>
           <p:nvPr/>
         </p:nvSpPr>
@@ -5221,7 +5491,7 @@
                   <a:srgbClr val="1A1A1A"/>
                 </a:solidFill>
               </a:rPr>
-              <a:t>ASSIGNMENT 2</a:t>
+              <a:t>ASSIGNMENT 1</a:t>
             </a:r>
           </a:p>
         </p:txBody>
@@ -5255,7 +5525,7 @@
                   <a:srgbClr val="6B7280"/>
                 </a:solidFill>
               </a:rPr>
-              <a:t>11 / 13</a:t>
+              <a:t>11 / 15</a:t>
             </a:r>
           </a:p>
         </p:txBody>
@@ -5288,7 +5558,7 @@
                   <a:srgbClr val="111827"/>
                 </a:solidFill>
               </a:rPr>
-              <a:t>Search strategies and quality criteria</a:t>
+              <a:t>Report writing with AI</a:t>
             </a:r>
           </a:p>
         </p:txBody>
@@ -5334,7 +5604,7 @@
                   <a:srgbClr val="111827"/>
                 </a:solidFill>
               </a:rPr>
-              <a:t>The question.</a:t>
+              <a:t>Three prompts, separately.</a:t>
             </a:r>
             <a:r>
               <a:rPr sz="1800">
@@ -5342,7 +5612,7 @@
                   <a:srgbClr val="111827"/>
                 </a:solidFill>
               </a:rPr>
-              <a:t> Good-quality reports on the geopolitics of the AI race — US, China, Europe.</a:t>
+              <a:t> Ask AI to argue the US dominates AI. Then, in a new conversation, that China dominates. Then Europe.</a:t>
             </a:r>
           </a:p>
           <a:p>
@@ -5365,7 +5635,7 @@
                   <a:srgbClr val="111827"/>
                 </a:solidFill>
               </a:rPr>
-              <a:t>Your criteria, explicit.</a:t>
+              <a:t>Don't cross-reference.</a:t>
             </a:r>
             <a:r>
               <a:rPr sz="1800">
@@ -5373,7 +5643,7 @@
                   <a:srgbClr val="111827"/>
                 </a:solidFill>
               </a:rPr>
-              <a:t> What makes a source “good quality” here? Write it down.</a:t>
+              <a:t> Each article should be written as if it's the only one AI is producing.</a:t>
             </a:r>
           </a:p>
           <a:p>
@@ -5396,7 +5666,7 @@
                   <a:srgbClr val="111827"/>
                 </a:solidFill>
               </a:rPr>
-              <a:t>Your strategy, explicit.</a:t>
+              <a:t>Read them back to back.</a:t>
             </a:r>
             <a:r>
               <a:rPr sz="1800">
@@ -5404,38 +5674,7 @@
                   <a:srgbClr val="111827"/>
                 </a:solidFill>
               </a:rPr>
-              <a:t> How did you search, and why?</a:t>
-            </a:r>
-          </a:p>
-          <a:p>
-            <a:pPr>
-              <a:spcAft>
-                <a:spcPts val="800"/>
-              </a:spcAft>
-            </a:pPr>
-            <a:r>
-              <a:rPr sz="1800">
-                <a:solidFill>
-                  <a:srgbClr val="111827"/>
-                </a:solidFill>
-              </a:rPr>
-              <a:t>•  </a:t>
-            </a:r>
-            <a:r>
-              <a:rPr sz="1800" b="1">
-                <a:solidFill>
-                  <a:srgbClr val="111827"/>
-                </a:solidFill>
-              </a:rPr>
-              <a:t>Then, AI — carefully.</a:t>
-            </a:r>
-            <a:r>
-              <a:rPr sz="1800">
-                <a:solidFill>
-                  <a:srgbClr val="111827"/>
-                </a:solidFill>
-              </a:rPr>
-              <a:t> A first analysis of your sources with AI, with your strategy made explicit too.</a:t>
+              <a:t> What do you notice?</a:t>
             </a:r>
           </a:p>
         </p:txBody>
@@ -5562,7 +5801,7 @@
                   <a:srgbClr val="1A1A1A"/>
                 </a:solidFill>
               </a:rPr>
-              <a:t>WAY OF WORKING</a:t>
+              <a:t>TAKEAWAY</a:t>
             </a:r>
           </a:p>
         </p:txBody>
@@ -5596,7 +5835,7 @@
                   <a:srgbClr val="6B7280"/>
                 </a:solidFill>
               </a:rPr>
-              <a:t>12 / 13</a:t>
+              <a:t>12 / 15</a:t>
             </a:r>
           </a:p>
         </p:txBody>
@@ -5629,7 +5868,7 @@
                   <a:srgbClr val="111827"/>
                 </a:solidFill>
               </a:rPr>
-              <a:t>Peer review and the Socratic agent</a:t>
+              <a:t>AI gives you what you ask for</a:t>
             </a:r>
           </a:p>
         </p:txBody>
@@ -5675,7 +5914,7 @@
                   <a:srgbClr val="111827"/>
                 </a:solidFill>
               </a:rPr>
-              <a:t>Partner teams.</a:t>
+              <a:t>Not what's true.</a:t>
             </a:r>
             <a:r>
               <a:rPr sz="1800">
@@ -5683,7 +5922,7 @@
                   <a:srgbClr val="111827"/>
                 </a:solidFill>
               </a:rPr>
-              <a:t> Every team pairs up with another team to review each other's work.</a:t>
+              <a:t> Ask for the US case and you get a convincing US case — same for China, same for Europe.</a:t>
             </a:r>
           </a:p>
           <a:p>
@@ -5706,7 +5945,7 @@
                   <a:srgbClr val="111827"/>
                 </a:solidFill>
               </a:rPr>
-              <a:t>A Socratic agent.</a:t>
+              <a:t>Source diversity is the fix.</a:t>
             </a:r>
             <a:r>
               <a:rPr sz="1800">
@@ -5714,7 +5953,38 @@
                   <a:srgbClr val="111827"/>
                 </a:solidFill>
               </a:rPr>
-              <a:t> Every team's work also gets questioned by an AI tutor — informational, not scored.</a:t>
+              <a:t> That's what actually teaches you who leads — not a cleverer prompt.</a:t>
+            </a:r>
+          </a:p>
+          <a:p>
+            <a:pPr>
+              <a:spcAft>
+                <a:spcPts val="800"/>
+              </a:spcAft>
+            </a:pPr>
+            <a:r>
+              <a:rPr sz="1800">
+                <a:solidFill>
+                  <a:srgbClr val="111827"/>
+                </a:solidFill>
+              </a:rPr>
+              <a:t>•  </a:t>
+            </a:r>
+            <a:r>
+              <a:rPr sz="1800" b="1">
+                <a:solidFill>
+                  <a:srgbClr val="111827"/>
+                </a:solidFill>
+              </a:rPr>
+              <a:t>This matters twice.</a:t>
+            </a:r>
+            <a:r>
+              <a:rPr sz="1800">
+                <a:solidFill>
+                  <a:srgbClr val="111827"/>
+                </a:solidFill>
+              </a:rPr>
+              <a:t> For your business judgement (informed, unbiased) and for you personally (know your own starting position).</a:t>
             </a:r>
           </a:p>
         </p:txBody>
@@ -5841,7 +6111,7 @@
                   <a:srgbClr val="1A1A1A"/>
                 </a:solidFill>
               </a:rPr>
-              <a:t>OUR RULEBOOK</a:t>
+              <a:t>ASSIGNMENT 2</a:t>
             </a:r>
           </a:p>
         </p:txBody>
@@ -5875,7 +6145,627 @@
                   <a:srgbClr val="6B7280"/>
                 </a:solidFill>
               </a:rPr>
-              <a:t>13 / 13</a:t>
+              <a:t>13 / 15</a:t>
+            </a:r>
+          </a:p>
+        </p:txBody>
+      </p:sp>
+      <p:sp>
+        <p:nvSpPr>
+          <p:cNvPr id="5" name="TextBox 4"/>
+          <p:cNvSpPr txBox="1"/>
+          <p:nvPr/>
+        </p:nvSpPr>
+        <p:spPr>
+          <a:xfrm>
+            <a:off x="731520" y="914400"/>
+            <a:ext cx="10698480" cy="1188720"/>
+          </a:xfrm>
+          <a:prstGeom prst="rect">
+            <a:avLst/>
+          </a:prstGeom>
+          <a:noFill/>
+        </p:spPr>
+        <p:txBody>
+          <a:bodyPr wrap="square">
+            <a:spAutoFit/>
+          </a:bodyPr>
+          <a:lstStyle/>
+          <a:p>
+            <a:r>
+              <a:rPr sz="3200" b="1">
+                <a:solidFill>
+                  <a:srgbClr val="111827"/>
+                </a:solidFill>
+              </a:rPr>
+              <a:t>Search strategies and quality criteria</a:t>
+            </a:r>
+          </a:p>
+        </p:txBody>
+      </p:sp>
+      <p:sp>
+        <p:nvSpPr>
+          <p:cNvPr id="6" name="TextBox 5"/>
+          <p:cNvSpPr txBox="1"/>
+          <p:nvPr/>
+        </p:nvSpPr>
+        <p:spPr>
+          <a:xfrm>
+            <a:off x="731520" y="2103120"/>
+            <a:ext cx="10698480" cy="3931920"/>
+          </a:xfrm>
+          <a:prstGeom prst="rect">
+            <a:avLst/>
+          </a:prstGeom>
+          <a:noFill/>
+        </p:spPr>
+        <p:txBody>
+          <a:bodyPr wrap="square">
+            <a:spAutoFit/>
+          </a:bodyPr>
+          <a:lstStyle/>
+          <a:p>
+            <a:pPr>
+              <a:spcAft>
+                <a:spcPts val="800"/>
+              </a:spcAft>
+            </a:pPr>
+            <a:r>
+              <a:rPr sz="1800">
+                <a:solidFill>
+                  <a:srgbClr val="111827"/>
+                </a:solidFill>
+              </a:rPr>
+              <a:t>•  </a:t>
+            </a:r>
+            <a:r>
+              <a:rPr sz="1800" b="1">
+                <a:solidFill>
+                  <a:srgbClr val="111827"/>
+                </a:solidFill>
+              </a:rPr>
+              <a:t>The question.</a:t>
+            </a:r>
+            <a:r>
+              <a:rPr sz="1800">
+                <a:solidFill>
+                  <a:srgbClr val="111827"/>
+                </a:solidFill>
+              </a:rPr>
+              <a:t> Good-quality reports on the geopolitics of the AI race — US, China, Europe.</a:t>
+            </a:r>
+          </a:p>
+          <a:p>
+            <a:pPr>
+              <a:spcAft>
+                <a:spcPts val="800"/>
+              </a:spcAft>
+            </a:pPr>
+            <a:r>
+              <a:rPr sz="1800">
+                <a:solidFill>
+                  <a:srgbClr val="111827"/>
+                </a:solidFill>
+              </a:rPr>
+              <a:t>•  </a:t>
+            </a:r>
+            <a:r>
+              <a:rPr sz="1800" b="1">
+                <a:solidFill>
+                  <a:srgbClr val="111827"/>
+                </a:solidFill>
+              </a:rPr>
+              <a:t>Your criteria, explicit.</a:t>
+            </a:r>
+            <a:r>
+              <a:rPr sz="1800">
+                <a:solidFill>
+                  <a:srgbClr val="111827"/>
+                </a:solidFill>
+              </a:rPr>
+              <a:t> What makes a source “good quality” here? Write it down.</a:t>
+            </a:r>
+          </a:p>
+          <a:p>
+            <a:pPr>
+              <a:spcAft>
+                <a:spcPts val="800"/>
+              </a:spcAft>
+            </a:pPr>
+            <a:r>
+              <a:rPr sz="1800">
+                <a:solidFill>
+                  <a:srgbClr val="111827"/>
+                </a:solidFill>
+              </a:rPr>
+              <a:t>•  </a:t>
+            </a:r>
+            <a:r>
+              <a:rPr sz="1800" b="1">
+                <a:solidFill>
+                  <a:srgbClr val="111827"/>
+                </a:solidFill>
+              </a:rPr>
+              <a:t>Your strategy, explicit.</a:t>
+            </a:r>
+            <a:r>
+              <a:rPr sz="1800">
+                <a:solidFill>
+                  <a:srgbClr val="111827"/>
+                </a:solidFill>
+              </a:rPr>
+              <a:t> How did you search, and why?</a:t>
+            </a:r>
+          </a:p>
+          <a:p>
+            <a:pPr>
+              <a:spcAft>
+                <a:spcPts val="800"/>
+              </a:spcAft>
+            </a:pPr>
+            <a:r>
+              <a:rPr sz="1800">
+                <a:solidFill>
+                  <a:srgbClr val="111827"/>
+                </a:solidFill>
+              </a:rPr>
+              <a:t>•  </a:t>
+            </a:r>
+            <a:r>
+              <a:rPr sz="1800" b="1">
+                <a:solidFill>
+                  <a:srgbClr val="111827"/>
+                </a:solidFill>
+              </a:rPr>
+              <a:t>Then, AI — carefully.</a:t>
+            </a:r>
+            <a:r>
+              <a:rPr sz="1800">
+                <a:solidFill>
+                  <a:srgbClr val="111827"/>
+                </a:solidFill>
+              </a:rPr>
+              <a:t> A first analysis of your sources with AI, with your strategy made explicit too.</a:t>
+            </a:r>
+          </a:p>
+        </p:txBody>
+      </p:sp>
+      <p:sp>
+        <p:nvSpPr>
+          <p:cNvPr id="7" name="TextBox 6"/>
+          <p:cNvSpPr txBox="1"/>
+          <p:nvPr/>
+        </p:nvSpPr>
+        <p:spPr>
+          <a:xfrm>
+            <a:off x="731520" y="6309360"/>
+            <a:ext cx="7315200" cy="320040"/>
+          </a:xfrm>
+          <a:prstGeom prst="rect">
+            <a:avLst/>
+          </a:prstGeom>
+          <a:noFill/>
+        </p:spPr>
+        <p:txBody>
+          <a:bodyPr wrap="square">
+            <a:spAutoFit/>
+          </a:bodyPr>
+          <a:lstStyle/>
+          <a:p>
+            <a:r>
+              <a:rPr sz="900">
+                <a:solidFill>
+                  <a:srgbClr val="6B7280"/>
+                </a:solidFill>
+              </a:rPr>
+              <a:t>AI in Business · week 2</a:t>
+            </a:r>
+          </a:p>
+        </p:txBody>
+      </p:sp>
+    </p:spTree>
+  </p:cSld>
+  <p:clrMapOvr>
+    <a:masterClrMapping/>
+  </p:clrMapOvr>
+</p:sld>
+</file>
+
+<file path=ppt/slides/slide14.xml><?xml version="1.0" encoding="utf-8"?>
+<p:sld xmlns:a="http://schemas.openxmlformats.org/drawingml/2006/main" xmlns:p="http://schemas.openxmlformats.org/presentationml/2006/main" xmlns:r="http://schemas.openxmlformats.org/officeDocument/2006/relationships">
+  <p:cSld>
+    <p:spTree>
+      <p:nvGrpSpPr>
+        <p:cNvPr id="1" name=""/>
+        <p:cNvGrpSpPr/>
+        <p:nvPr/>
+      </p:nvGrpSpPr>
+      <p:grpSpPr/>
+      <p:sp>
+        <p:nvSpPr>
+          <p:cNvPr id="2" name="Rectangle 1"/>
+          <p:cNvSpPr/>
+          <p:nvPr/>
+        </p:nvSpPr>
+        <p:spPr>
+          <a:xfrm>
+            <a:off x="731520" y="566928"/>
+            <a:ext cx="320040" cy="73152"/>
+          </a:xfrm>
+          <a:prstGeom prst="rect">
+            <a:avLst/>
+          </a:prstGeom>
+          <a:solidFill>
+            <a:srgbClr val="D4DB3E"/>
+          </a:solidFill>
+          <a:ln>
+            <a:noFill/>
+          </a:ln>
+        </p:spPr>
+        <p:style>
+          <a:lnRef idx="1">
+            <a:schemeClr val="accent1"/>
+          </a:lnRef>
+          <a:fillRef idx="3">
+            <a:schemeClr val="accent1"/>
+          </a:fillRef>
+          <a:effectRef idx="2">
+            <a:schemeClr val="accent1"/>
+          </a:effectRef>
+          <a:fontRef idx="minor">
+            <a:schemeClr val="lt1"/>
+          </a:fontRef>
+        </p:style>
+        <p:txBody>
+          <a:bodyPr rtlCol="0" anchor="ctr"/>
+          <a:lstStyle/>
+          <a:p>
+            <a:pPr algn="ctr"/>
+          </a:p>
+        </p:txBody>
+      </p:sp>
+      <p:sp>
+        <p:nvSpPr>
+          <p:cNvPr id="3" name="TextBox 2"/>
+          <p:cNvSpPr txBox="1"/>
+          <p:nvPr/>
+        </p:nvSpPr>
+        <p:spPr>
+          <a:xfrm>
+            <a:off x="1143000" y="411480"/>
+            <a:ext cx="7315200" cy="365760"/>
+          </a:xfrm>
+          <a:prstGeom prst="rect">
+            <a:avLst/>
+          </a:prstGeom>
+          <a:noFill/>
+        </p:spPr>
+        <p:txBody>
+          <a:bodyPr wrap="square">
+            <a:spAutoFit/>
+          </a:bodyPr>
+          <a:lstStyle/>
+          <a:p>
+            <a:r>
+              <a:rPr sz="1100" b="1">
+                <a:solidFill>
+                  <a:srgbClr val="1A1A1A"/>
+                </a:solidFill>
+              </a:rPr>
+              <a:t>WAY OF WORKING</a:t>
+            </a:r>
+          </a:p>
+        </p:txBody>
+      </p:sp>
+      <p:sp>
+        <p:nvSpPr>
+          <p:cNvPr id="4" name="TextBox 3"/>
+          <p:cNvSpPr txBox="1"/>
+          <p:nvPr/>
+        </p:nvSpPr>
+        <p:spPr>
+          <a:xfrm>
+            <a:off x="9601200" y="411480"/>
+            <a:ext cx="1828800" cy="365760"/>
+          </a:xfrm>
+          <a:prstGeom prst="rect">
+            <a:avLst/>
+          </a:prstGeom>
+          <a:noFill/>
+        </p:spPr>
+        <p:txBody>
+          <a:bodyPr wrap="square">
+            <a:spAutoFit/>
+          </a:bodyPr>
+          <a:lstStyle/>
+          <a:p>
+            <a:pPr algn="r"/>
+            <a:r>
+              <a:rPr sz="1100">
+                <a:solidFill>
+                  <a:srgbClr val="6B7280"/>
+                </a:solidFill>
+              </a:rPr>
+              <a:t>14 / 15</a:t>
+            </a:r>
+          </a:p>
+        </p:txBody>
+      </p:sp>
+      <p:sp>
+        <p:nvSpPr>
+          <p:cNvPr id="5" name="TextBox 4"/>
+          <p:cNvSpPr txBox="1"/>
+          <p:nvPr/>
+        </p:nvSpPr>
+        <p:spPr>
+          <a:xfrm>
+            <a:off x="731520" y="914400"/>
+            <a:ext cx="10698480" cy="1188720"/>
+          </a:xfrm>
+          <a:prstGeom prst="rect">
+            <a:avLst/>
+          </a:prstGeom>
+          <a:noFill/>
+        </p:spPr>
+        <p:txBody>
+          <a:bodyPr wrap="square">
+            <a:spAutoFit/>
+          </a:bodyPr>
+          <a:lstStyle/>
+          <a:p>
+            <a:r>
+              <a:rPr sz="3200" b="1">
+                <a:solidFill>
+                  <a:srgbClr val="111827"/>
+                </a:solidFill>
+              </a:rPr>
+              <a:t>Peer review and the Socratic agent</a:t>
+            </a:r>
+          </a:p>
+        </p:txBody>
+      </p:sp>
+      <p:sp>
+        <p:nvSpPr>
+          <p:cNvPr id="6" name="TextBox 5"/>
+          <p:cNvSpPr txBox="1"/>
+          <p:nvPr/>
+        </p:nvSpPr>
+        <p:spPr>
+          <a:xfrm>
+            <a:off x="731520" y="2103120"/>
+            <a:ext cx="10698480" cy="3931920"/>
+          </a:xfrm>
+          <a:prstGeom prst="rect">
+            <a:avLst/>
+          </a:prstGeom>
+          <a:noFill/>
+        </p:spPr>
+        <p:txBody>
+          <a:bodyPr wrap="square">
+            <a:spAutoFit/>
+          </a:bodyPr>
+          <a:lstStyle/>
+          <a:p>
+            <a:pPr>
+              <a:spcAft>
+                <a:spcPts val="800"/>
+              </a:spcAft>
+            </a:pPr>
+            <a:r>
+              <a:rPr sz="1800">
+                <a:solidFill>
+                  <a:srgbClr val="111827"/>
+                </a:solidFill>
+              </a:rPr>
+              <a:t>•  </a:t>
+            </a:r>
+            <a:r>
+              <a:rPr sz="1800" b="1">
+                <a:solidFill>
+                  <a:srgbClr val="111827"/>
+                </a:solidFill>
+              </a:rPr>
+              <a:t>Partner teams.</a:t>
+            </a:r>
+            <a:r>
+              <a:rPr sz="1800">
+                <a:solidFill>
+                  <a:srgbClr val="111827"/>
+                </a:solidFill>
+              </a:rPr>
+              <a:t> Every team pairs up with another team to review each other's work.</a:t>
+            </a:r>
+          </a:p>
+          <a:p>
+            <a:pPr>
+              <a:spcAft>
+                <a:spcPts val="800"/>
+              </a:spcAft>
+            </a:pPr>
+            <a:r>
+              <a:rPr sz="1800">
+                <a:solidFill>
+                  <a:srgbClr val="111827"/>
+                </a:solidFill>
+              </a:rPr>
+              <a:t>•  </a:t>
+            </a:r>
+            <a:r>
+              <a:rPr sz="1800" b="1">
+                <a:solidFill>
+                  <a:srgbClr val="111827"/>
+                </a:solidFill>
+              </a:rPr>
+              <a:t>A Socratic agent.</a:t>
+            </a:r>
+            <a:r>
+              <a:rPr sz="1800">
+                <a:solidFill>
+                  <a:srgbClr val="111827"/>
+                </a:solidFill>
+              </a:rPr>
+              <a:t> Every team's work also gets questioned by an AI tutor — informational, not scored.</a:t>
+            </a:r>
+          </a:p>
+        </p:txBody>
+      </p:sp>
+      <p:sp>
+        <p:nvSpPr>
+          <p:cNvPr id="7" name="TextBox 6"/>
+          <p:cNvSpPr txBox="1"/>
+          <p:nvPr/>
+        </p:nvSpPr>
+        <p:spPr>
+          <a:xfrm>
+            <a:off x="731520" y="6309360"/>
+            <a:ext cx="7315200" cy="320040"/>
+          </a:xfrm>
+          <a:prstGeom prst="rect">
+            <a:avLst/>
+          </a:prstGeom>
+          <a:noFill/>
+        </p:spPr>
+        <p:txBody>
+          <a:bodyPr wrap="square">
+            <a:spAutoFit/>
+          </a:bodyPr>
+          <a:lstStyle/>
+          <a:p>
+            <a:r>
+              <a:rPr sz="900">
+                <a:solidFill>
+                  <a:srgbClr val="6B7280"/>
+                </a:solidFill>
+              </a:rPr>
+              <a:t>AI in Business · week 2</a:t>
+            </a:r>
+          </a:p>
+        </p:txBody>
+      </p:sp>
+    </p:spTree>
+  </p:cSld>
+  <p:clrMapOvr>
+    <a:masterClrMapping/>
+  </p:clrMapOvr>
+</p:sld>
+</file>
+
+<file path=ppt/slides/slide15.xml><?xml version="1.0" encoding="utf-8"?>
+<p:sld xmlns:a="http://schemas.openxmlformats.org/drawingml/2006/main" xmlns:p="http://schemas.openxmlformats.org/presentationml/2006/main" xmlns:r="http://schemas.openxmlformats.org/officeDocument/2006/relationships">
+  <p:cSld>
+    <p:spTree>
+      <p:nvGrpSpPr>
+        <p:cNvPr id="1" name=""/>
+        <p:cNvGrpSpPr/>
+        <p:nvPr/>
+      </p:nvGrpSpPr>
+      <p:grpSpPr/>
+      <p:sp>
+        <p:nvSpPr>
+          <p:cNvPr id="2" name="Rectangle 1"/>
+          <p:cNvSpPr/>
+          <p:nvPr/>
+        </p:nvSpPr>
+        <p:spPr>
+          <a:xfrm>
+            <a:off x="731520" y="566928"/>
+            <a:ext cx="320040" cy="73152"/>
+          </a:xfrm>
+          <a:prstGeom prst="rect">
+            <a:avLst/>
+          </a:prstGeom>
+          <a:solidFill>
+            <a:srgbClr val="D4DB3E"/>
+          </a:solidFill>
+          <a:ln>
+            <a:noFill/>
+          </a:ln>
+        </p:spPr>
+        <p:style>
+          <a:lnRef idx="1">
+            <a:schemeClr val="accent1"/>
+          </a:lnRef>
+          <a:fillRef idx="3">
+            <a:schemeClr val="accent1"/>
+          </a:fillRef>
+          <a:effectRef idx="2">
+            <a:schemeClr val="accent1"/>
+          </a:effectRef>
+          <a:fontRef idx="minor">
+            <a:schemeClr val="lt1"/>
+          </a:fontRef>
+        </p:style>
+        <p:txBody>
+          <a:bodyPr rtlCol="0" anchor="ctr"/>
+          <a:lstStyle/>
+          <a:p>
+            <a:pPr algn="ctr"/>
+          </a:p>
+        </p:txBody>
+      </p:sp>
+      <p:sp>
+        <p:nvSpPr>
+          <p:cNvPr id="3" name="TextBox 2"/>
+          <p:cNvSpPr txBox="1"/>
+          <p:nvPr/>
+        </p:nvSpPr>
+        <p:spPr>
+          <a:xfrm>
+            <a:off x="1143000" y="411480"/>
+            <a:ext cx="7315200" cy="365760"/>
+          </a:xfrm>
+          <a:prstGeom prst="rect">
+            <a:avLst/>
+          </a:prstGeom>
+          <a:noFill/>
+        </p:spPr>
+        <p:txBody>
+          <a:bodyPr wrap="square">
+            <a:spAutoFit/>
+          </a:bodyPr>
+          <a:lstStyle/>
+          <a:p>
+            <a:r>
+              <a:rPr sz="1100" b="1">
+                <a:solidFill>
+                  <a:srgbClr val="1A1A1A"/>
+                </a:solidFill>
+              </a:rPr>
+              <a:t>OUR RULEBOOK</a:t>
+            </a:r>
+          </a:p>
+        </p:txBody>
+      </p:sp>
+      <p:sp>
+        <p:nvSpPr>
+          <p:cNvPr id="4" name="TextBox 3"/>
+          <p:cNvSpPr txBox="1"/>
+          <p:nvPr/>
+        </p:nvSpPr>
+        <p:spPr>
+          <a:xfrm>
+            <a:off x="9601200" y="411480"/>
+            <a:ext cx="1828800" cy="365760"/>
+          </a:xfrm>
+          <a:prstGeom prst="rect">
+            <a:avLst/>
+          </a:prstGeom>
+          <a:noFill/>
+        </p:spPr>
+        <p:txBody>
+          <a:bodyPr wrap="square">
+            <a:spAutoFit/>
+          </a:bodyPr>
+          <a:lstStyle/>
+          <a:p>
+            <a:pPr algn="r"/>
+            <a:r>
+              <a:rPr sz="1100">
+                <a:solidFill>
+                  <a:srgbClr val="6B7280"/>
+                </a:solidFill>
+              </a:rPr>
+              <a:t>15 / 15</a:t>
             </a:r>
           </a:p>
         </p:txBody>
@@ -6206,7 +7096,7 @@
                   <a:srgbClr val="6B7280"/>
                 </a:solidFill>
               </a:rPr>
-              <a:t>2 / 13</a:t>
+              <a:t>2 / 15</a:t>
             </a:r>
           </a:p>
         </p:txBody>
@@ -6538,7 +7428,7 @@
                   <a:srgbClr val="6B7280"/>
                 </a:solidFill>
               </a:rPr>
-              <a:t>3 / 13</a:t>
+              <a:t>3 / 15</a:t>
             </a:r>
           </a:p>
         </p:txBody>
@@ -6848,7 +7738,7 @@
                   <a:srgbClr val="6B7280"/>
                 </a:solidFill>
               </a:rPr>
-              <a:t>4 / 13</a:t>
+              <a:t>4 / 15</a:t>
             </a:r>
           </a:p>
         </p:txBody>
@@ -7158,7 +8048,7 @@
                   <a:srgbClr val="6B7280"/>
                 </a:solidFill>
               </a:rPr>
-              <a:t>5 / 13</a:t>
+              <a:t>5 / 15</a:t>
             </a:r>
           </a:p>
         </p:txBody>
@@ -7191,7 +8081,7 @@
                   <a:srgbClr val="111827"/>
                 </a:solidFill>
               </a:rPr>
-              <a:t>Your PRDs — three things almost every draft missed</a:t>
+              <a:t>Your PRDs — nothing in them could be proven wrong</a:t>
             </a:r>
           </a:p>
         </p:txBody>
@@ -7246,7 +8136,7 @@
                   <a:srgbClr val="111827"/>
                 </a:solidFill>
               </a:rPr>
-              <a:t>.</a:t>
+              <a:t>. One missing thread, in three places.</a:t>
             </a:r>
           </a:p>
           <a:p>
@@ -7269,7 +8159,7 @@
                   <a:srgbClr val="111827"/>
                 </a:solidFill>
               </a:rPr>
-              <a:t>How you will know it works.</a:t>
+              <a:t>Before — a pain point with evidence.</a:t>
             </a:r>
             <a:r>
               <a:rPr sz="1800">
@@ -7285,7 +8175,7 @@
                   <a:srgbClr val="4B5563"/>
                 </a:solidFill>
               </a:rPr>
-              <a:t>“Important claims should be traceable to their original source.”</a:t>
+              <a:t>“Researchers have to manually search for information, evaluate sources, translate Dutch material … This takes a lot of time.”</a:t>
             </a:r>
           </a:p>
           <a:p>
@@ -7308,7 +8198,7 @@
                   <a:srgbClr val="111827"/>
                 </a:solidFill>
               </a:rPr>
-              <a:t>A hypothesis you could be wrong about.</a:t>
+              <a:t>Claim — a hypothesis you could be wrong about.</a:t>
             </a:r>
             <a:r>
               <a:rPr sz="1800">
@@ -7324,7 +8214,7 @@
                   <a:srgbClr val="4B5563"/>
                 </a:solidFill>
               </a:rPr>
-              <a:t>“The platform should reduce repetitive research and writing work.”</a:t>
+              <a:t>“The overall goal is to make the research process faster, more consistent and accessible to every team member.”</a:t>
             </a:r>
           </a:p>
           <a:p>
@@ -7347,7 +8237,7 @@
                   <a:srgbClr val="111827"/>
                 </a:solidFill>
               </a:rPr>
-              <a:t>Pain points with evidence.</a:t>
+              <a:t>After — how you will know it works.</a:t>
             </a:r>
             <a:r>
               <a:rPr sz="1800">
@@ -7363,7 +8253,7 @@
                   <a:srgbClr val="4B5563"/>
                 </a:solidFill>
               </a:rPr>
-              <a:t>“Researching AI applications for designers and engineers is time-consuming.”</a:t>
+              <a:t>“The platform is successful when the research team can consistently produce one reliable and reviewed handbook page per week.”</a:t>
             </a:r>
           </a:p>
         </p:txBody>
@@ -7524,7 +8414,7 @@
                   <a:srgbClr val="6B7280"/>
                 </a:solidFill>
               </a:rPr>
-              <a:t>6 / 13</a:t>
+              <a:t>6 / 15</a:t>
             </a:r>
           </a:p>
         </p:txBody>
@@ -7800,7 +8690,7 @@
                   <a:srgbClr val="1A1A1A"/>
                 </a:solidFill>
               </a:rPr>
-              <a:t>TAKEAWAY</a:t>
+              <a:t>AEL · THE BLUEPRINT</a:t>
             </a:r>
           </a:p>
         </p:txBody>
@@ -7834,7 +8724,7 @@
                   <a:srgbClr val="6B7280"/>
                 </a:solidFill>
               </a:rPr>
-              <a:t>7 / 13</a:t>
+              <a:t>7 / 15</a:t>
             </a:r>
           </a:p>
         </p:txBody>
@@ -7867,7 +8757,7 @@
                   <a:srgbClr val="111827"/>
                 </a:solidFill>
               </a:rPr>
-              <a:t>AI braindump, or human-reviewed?</a:t>
+              <a:t>A blueprint says what the parts are, not how to code them</a:t>
             </a:r>
           </a:p>
         </p:txBody>
@@ -7913,7 +8803,7 @@
                   <a:srgbClr val="111827"/>
                 </a:solidFill>
               </a:rPr>
-              <a:t>We look at every assignment this way — and so should you.</a:t>
+              <a:t>Implements your PRD. One to three pages.</a:t>
             </a:r>
           </a:p>
           <a:p>
@@ -7928,7 +8818,47 @@
                   <a:srgbClr val="111827"/>
                 </a:solidFill>
               </a:rPr>
-              <a:t>Make that visible in your own work: what did you write, what did AI draft, and what did you check?</a:t>
+              <a:t>•  </a:t>
+            </a:r>
+            <a:r>
+              <a:rPr sz="1800">
+                <a:solidFill>
+                  <a:srgbClr val="111827"/>
+                </a:solidFill>
+              </a:rPr>
+              <a:t>The bar: </a:t>
+            </a:r>
+            <a:r>
+              <a:rPr sz="1800" i="1">
+                <a:solidFill>
+                  <a:srgbClr val="4B5563"/>
+                </a:solidFill>
+                <a:hlinkClick r:id="rId2"/>
+              </a:rPr>
+              <a:t>what each part does, what passes between them, where the line is</a:t>
+            </a:r>
+          </a:p>
+          <a:p>
+            <a:pPr>
+              <a:spcAft>
+                <a:spcPts val="800"/>
+              </a:spcAft>
+            </a:pPr>
+            <a:r>
+              <a:rPr sz="1800">
+                <a:solidFill>
+                  <a:srgbClr val="111827"/>
+                </a:solidFill>
+              </a:rPr>
+              <a:t>•  </a:t>
+            </a:r>
+            <a:r>
+              <a:rPr sz="1800">
+                <a:solidFill>
+                  <a:srgbClr val="111827"/>
+                </a:solidFill>
+              </a:rPr>
+              <a:t>Boxes and words. The developer holds the pen; the whole team reads it.</a:t>
             </a:r>
           </a:p>
         </p:txBody>
@@ -8055,7 +8985,7 @@
                   <a:srgbClr val="1A1A1A"/>
                 </a:solidFill>
               </a:rPr>
-              <a:t>ASSIGNMENTS</a:t>
+              <a:t>AEL · THE BLUEPRINT</a:t>
             </a:r>
           </a:p>
         </p:txBody>
@@ -8089,7 +9019,7 @@
                   <a:srgbClr val="6B7280"/>
                 </a:solidFill>
               </a:rPr>
-              <a:t>8 / 13</a:t>
+              <a:t>8 / 15</a:t>
             </a:r>
           </a:p>
         </p:txBody>
@@ -8122,7 +9052,7 @@
                   <a:srgbClr val="111827"/>
                 </a:solidFill>
               </a:rPr>
-              <a:t>Two assignments this week</a:t>
+              <a:t>Every PRD promise lands in a part, or you say why not</a:t>
             </a:r>
           </a:p>
         </p:txBody>
@@ -8136,7 +9066,7 @@
         <p:spPr>
           <a:xfrm>
             <a:off x="731520" y="2103120"/>
-            <a:ext cx="5120640" cy="3931920"/>
+            <a:ext cx="10698480" cy="3931920"/>
           </a:xfrm>
           <a:prstGeom prst="rect">
             <a:avLst/>
@@ -8155,12 +9085,20 @@
               </a:spcAft>
             </a:pPr>
             <a:r>
-              <a:rPr sz="1100" b="1">
-                <a:solidFill>
-                  <a:srgbClr val="4B5563"/>
-                </a:solidFill>
-              </a:rPr>
-              <a:t>ASSIGNMENT 1</a:t>
+              <a:rPr sz="1800">
+                <a:solidFill>
+                  <a:srgbClr val="111827"/>
+                </a:solidFill>
+              </a:rPr>
+              <a:t>•  </a:t>
+            </a:r>
+            <a:r>
+              <a:rPr sz="1800">
+                <a:solidFill>
+                  <a:srgbClr val="111827"/>
+                </a:solidFill>
+              </a:rPr>
+              <a:t>Parts · what passes between them · the line nothing may cross</a:t>
             </a:r>
           </a:p>
           <a:p>
@@ -8183,7 +9121,7 @@
                   <a:srgbClr val="111827"/>
                 </a:solidFill>
               </a:rPr>
-              <a:t>Report writing with AI — three articles, three “winners”</a:t>
+              <a:t>The tutor reads it beside your PRD: dropped promise, unasked part, or a departure you named</a:t>
             </a:r>
           </a:p>
           <a:p>
@@ -8206,7 +9144,7 @@
                   <a:srgbClr val="111827"/>
                 </a:solidFill>
               </a:rPr>
-              <a:t>Goal: see bias appear on purpose</a:t>
+              <a:t>Due before week 3, in your Teams channel. Questions back, no mark.</a:t>
             </a:r>
           </a:p>
         </p:txBody>
@@ -8214,90 +9152,6 @@
       <p:sp>
         <p:nvSpPr>
           <p:cNvPr id="7" name="TextBox 6"/>
-          <p:cNvSpPr txBox="1"/>
-          <p:nvPr/>
-        </p:nvSpPr>
-        <p:spPr>
-          <a:xfrm>
-            <a:off x="6309360" y="2103120"/>
-            <a:ext cx="5120640" cy="3931920"/>
-          </a:xfrm>
-          <a:prstGeom prst="rect">
-            <a:avLst/>
-          </a:prstGeom>
-          <a:noFill/>
-        </p:spPr>
-        <p:txBody>
-          <a:bodyPr wrap="square">
-            <a:spAutoFit/>
-          </a:bodyPr>
-          <a:lstStyle/>
-          <a:p>
-            <a:pPr>
-              <a:spcAft>
-                <a:spcPts val="800"/>
-              </a:spcAft>
-            </a:pPr>
-            <a:r>
-              <a:rPr sz="1100" b="1">
-                <a:solidFill>
-                  <a:srgbClr val="4B5563"/>
-                </a:solidFill>
-              </a:rPr>
-              <a:t>ASSIGNMENT 2</a:t>
-            </a:r>
-          </a:p>
-          <a:p>
-            <a:pPr>
-              <a:spcAft>
-                <a:spcPts val="800"/>
-              </a:spcAft>
-            </a:pPr>
-            <a:r>
-              <a:rPr sz="1800">
-                <a:solidFill>
-                  <a:srgbClr val="111827"/>
-                </a:solidFill>
-              </a:rPr>
-              <a:t>•  </a:t>
-            </a:r>
-            <a:r>
-              <a:rPr sz="1800">
-                <a:solidFill>
-                  <a:srgbClr val="111827"/>
-                </a:solidFill>
-              </a:rPr>
-              <a:t>Search strategies and quality criteria — US, China, Europe</a:t>
-            </a:r>
-          </a:p>
-          <a:p>
-            <a:pPr>
-              <a:spcAft>
-                <a:spcPts val="800"/>
-              </a:spcAft>
-            </a:pPr>
-            <a:r>
-              <a:rPr sz="1800">
-                <a:solidFill>
-                  <a:srgbClr val="111827"/>
-                </a:solidFill>
-              </a:rPr>
-              <a:t>•  </a:t>
-            </a:r>
-            <a:r>
-              <a:rPr sz="1800">
-                <a:solidFill>
-                  <a:srgbClr val="111827"/>
-                </a:solidFill>
-              </a:rPr>
-              <a:t>Goal: make your criteria and strategy explicit</a:t>
-            </a:r>
-          </a:p>
-        </p:txBody>
-      </p:sp>
-      <p:sp>
-        <p:nvSpPr>
-          <p:cNvPr id="8" name="TextBox 7"/>
           <p:cNvSpPr txBox="1"/>
           <p:nvPr/>
         </p:nvSpPr>
@@ -8417,7 +9271,7 @@
                   <a:srgbClr val="1A1A1A"/>
                 </a:solidFill>
               </a:rPr>
-              <a:t>ASSIGNMENT 1</a:t>
+              <a:t>TAKEAWAY</a:t>
             </a:r>
           </a:p>
         </p:txBody>
@@ -8451,7 +9305,7 @@
                   <a:srgbClr val="6B7280"/>
                 </a:solidFill>
               </a:rPr>
-              <a:t>9 / 13</a:t>
+              <a:t>9 / 15</a:t>
             </a:r>
           </a:p>
         </p:txBody>
@@ -8484,7 +9338,7 @@
                   <a:srgbClr val="111827"/>
                 </a:solidFill>
               </a:rPr>
-              <a:t>Report writing with AI</a:t>
+              <a:t>AI braindump, or human-reviewed?</a:t>
             </a:r>
           </a:p>
         </p:txBody>
@@ -8525,20 +9379,12 @@
               <a:t>•  </a:t>
             </a:r>
             <a:r>
-              <a:rPr sz="1800" b="1">
-                <a:solidFill>
-                  <a:srgbClr val="111827"/>
-                </a:solidFill>
-              </a:rPr>
-              <a:t>Three prompts, separately.</a:t>
-            </a:r>
-            <a:r>
               <a:rPr sz="1800">
                 <a:solidFill>
                   <a:srgbClr val="111827"/>
                 </a:solidFill>
               </a:rPr>
-              <a:t> Ask AI to argue the US dominates AI. Then, in a new conversation, that China dominates. Then Europe.</a:t>
+              <a:t>We look at every assignment this way — and so should you.</a:t>
             </a:r>
           </a:p>
           <a:p>
@@ -8553,54 +9399,7 @@
                   <a:srgbClr val="111827"/>
                 </a:solidFill>
               </a:rPr>
-              <a:t>•  </a:t>
-            </a:r>
-            <a:r>
-              <a:rPr sz="1800" b="1">
-                <a:solidFill>
-                  <a:srgbClr val="111827"/>
-                </a:solidFill>
-              </a:rPr>
-              <a:t>Don't cross-reference.</a:t>
-            </a:r>
-            <a:r>
-              <a:rPr sz="1800">
-                <a:solidFill>
-                  <a:srgbClr val="111827"/>
-                </a:solidFill>
-              </a:rPr>
-              <a:t> Each article should be written as if it's the only one AI is producing.</a:t>
-            </a:r>
-          </a:p>
-          <a:p>
-            <a:pPr>
-              <a:spcAft>
-                <a:spcPts val="800"/>
-              </a:spcAft>
-            </a:pPr>
-            <a:r>
-              <a:rPr sz="1800">
-                <a:solidFill>
-                  <a:srgbClr val="111827"/>
-                </a:solidFill>
-              </a:rPr>
-              <a:t>•  </a:t>
-            </a:r>
-            <a:r>
-              <a:rPr sz="1800" b="1">
-                <a:solidFill>
-                  <a:srgbClr val="111827"/>
-                </a:solidFill>
-              </a:rPr>
-              <a:t>Read them back to back.</a:t>
-            </a:r>
-            <a:r>
-              <a:rPr sz="1800">
-                <a:solidFill>
-                  <a:srgbClr val="111827"/>
-                </a:solidFill>
-              </a:rPr>
-              <a:t> What do you notice?</a:t>
+              <a:t>Make that visible in your own work: what did you write, what did AI draft, and what did you check?</a:t>
             </a:r>
           </a:p>
         </p:txBody>

--- a/project-documentation/slides/week-02-deck.pptx
+++ b/project-documentation/slides/week-02-deck.pptx
@@ -8826,7 +8826,7 @@
                   <a:srgbClr val="111827"/>
                 </a:solidFill>
               </a:rPr>
-              <a:t>The bar: </a:t>
+              <a:t>Done when a reader can tell: </a:t>
             </a:r>
             <a:r>
               <a:rPr sz="1800" i="1">

--- a/project-documentation/slides/week-02-deck.pptx
+++ b/project-documentation/slides/week-02-deck.pptx
@@ -5953,7 +5953,7 @@
                   <a:srgbClr val="111827"/>
                 </a:solidFill>
               </a:rPr>
-              <a:t> That's what actually teaches you who leads — not a cleverer prompt.</a:t>
+              <a:t> A cleverer prompt will not tell you who leads.</a:t>
             </a:r>
           </a:p>
           <a:p>

--- a/project-documentation/slides/week-02-deck.pptx
+++ b/project-documentation/slides/week-02-deck.pptx
@@ -6930,12 +6930,28 @@
               </a:spcAft>
             </a:pPr>
             <a:r>
-              <a:rPr sz="1800" i="1">
-                <a:solidFill>
-                  <a:srgbClr val="6B7280"/>
-                </a:solidFill>
-              </a:rPr>
-              <a:t>Added together in the session.</a:t>
+              <a:rPr sz="1800">
+                <a:solidFill>
+                  <a:srgbClr val="111827"/>
+                </a:solidFill>
+              </a:rPr>
+              <a:t>Do something </a:t>
+            </a:r>
+            <a:r>
+              <a:rPr sz="1800" b="1">
+                <a:solidFill>
+                  <a:srgbClr val="111827"/>
+                </a:solidFill>
+              </a:rPr>
+              <a:t>weird</a:t>
+            </a:r>
+            <a:r>
+              <a:rPr sz="1800">
+                <a:solidFill>
+                  <a:srgbClr val="111827"/>
+                </a:solidFill>
+              </a:rPr>
+              <a:t>.</a:t>
             </a:r>
           </a:p>
         </p:txBody>
